--- a/09_meetings/UMI_Sales_Review_2026/ISZE_UMI_Sales_Review_FY2027_ModeA_only.pptx
+++ b/09_meetings/UMI_Sales_Review_2026/ISZE_UMI_Sales_Review_FY2027_ModeA_only.pptx
@@ -5645,6 +5645,34 @@
                 <a:latin typeface="Calibri"/>
               </a:rPr>
               <a:t>The chart is calendar years 2019–2026 only. 2026 is a working year-end estimate, not a fiscal-year figure.</a:t>
+            </a:r>
+          </a:p>
+          <a:p>
+            <a:pPr>
+              <a:lnSpc>
+                <a:spcPct val="125000"/>
+              </a:lnSpc>
+              <a:spcAft>
+                <a:spcPts val="1000"/>
+              </a:spcAft>
+            </a:pPr>
+            <a:r>
+              <a:rPr sz="1250" b="1">
+                <a:solidFill>
+                  <a:srgbClr val="CC0E1E"/>
+                </a:solidFill>
+                <a:latin typeface="Calibri"/>
+              </a:rPr>
+              <a:t>—  </a:t>
+            </a:r>
+            <a:r>
+              <a:rPr sz="1250">
+                <a:solidFill>
+                  <a:srgbClr val="1A1A1A"/>
+                </a:solidFill>
+                <a:latin typeface="Calibri"/>
+              </a:rPr>
+              <a:t>End-2026 mix: LCV / D-Max 17,161.</a:t>
             </a:r>
           </a:p>
           <a:p>
